--- a/system-design-101/vi/lessons/sd-06-003/slides/sd-06-003.pptx
+++ b/system-design-101/vi/lessons/sd-06-003/slides/sd-06-003.pptx
@@ -7633,7 +7633,7 @@
               <a:t>Chia</a:t>
             </a:r>
             <a:r>
-              <a:rPr lang="en-US" sz="3450" dirty="0" spc="-6" kern="0">
+              <a:rPr lang="en-US" sz="3450" dirty="0" spc="-2" kern="0">
                 <a:solidFill>
                   <a:srgbClr val="14161C"/>
                 </a:solidFill>
@@ -7641,10 +7641,10 @@
                 <a:ea typeface="Be Vietnam Pro SemiBold" pitchFamily="34" charset="-122"/>
                 <a:cs typeface="Be Vietnam Pro SemiBold" pitchFamily="34" charset="-120"/>
               </a:rPr>
-              <a:t> khóa</a:t>
-            </a:r>
-            <a:r>
-              <a:rPr lang="en-US" sz="3450" dirty="0" spc="-1" kern="0">
+              <a:t> thành</a:t>
+            </a:r>
+            <a:r>
+              <a:rPr lang="en-US" sz="3450" dirty="0" spc="-6" kern="0">
                 <a:solidFill>
                   <a:srgbClr val="14161C"/>
                 </a:solidFill>
@@ -7652,10 +7652,10 @@
                 <a:ea typeface="Be Vietnam Pro SemiBold" pitchFamily="34" charset="-122"/>
                 <a:cs typeface="Be Vietnam Pro SemiBold" pitchFamily="34" charset="-120"/>
               </a:rPr>
-              <a:t> lớn</a:t>
-            </a:r>
-            <a:r>
-              <a:rPr lang="en-US" sz="3450" dirty="0" spc="-2" kern="0">
+              <a:t> khóa</a:t>
+            </a:r>
+            <a:r>
+              <a:rPr lang="en-US" sz="3450" dirty="0" spc="-4" kern="0">
                 <a:solidFill>
                   <a:srgbClr val="14161C"/>
                 </a:solidFill>
@@ -7663,10 +7663,10 @@
                 <a:ea typeface="Be Vietnam Pro SemiBold" pitchFamily="34" charset="-122"/>
                 <a:cs typeface="Be Vietnam Pro SemiBold" pitchFamily="34" charset="-120"/>
               </a:rPr>
-              <a:t> thành</a:t>
-            </a:r>
-            <a:r>
-              <a:rPr lang="en-US" sz="3450" dirty="0" spc="-6" kern="0">
+              <a:t> nhỏ,</a:t>
+            </a:r>
+            <a:r>
+              <a:rPr lang="en-US" sz="3450" dirty="0" spc="-2" kern="0">
                 <a:solidFill>
                   <a:srgbClr val="14161C"/>
                 </a:solidFill>
@@ -7674,10 +7674,10 @@
                 <a:ea typeface="Be Vietnam Pro SemiBold" pitchFamily="34" charset="-122"/>
                 <a:cs typeface="Be Vietnam Pro SemiBold" pitchFamily="34" charset="-120"/>
               </a:rPr>
-              <a:t> khóa</a:t>
-            </a:r>
-            <a:r>
-              <a:rPr lang="en-US" sz="3450" dirty="0" spc="-3" kern="0">
+              <a:t> hoặc</a:t>
+            </a:r>
+            <a:r>
+              <a:rPr lang="en-US" sz="3450" dirty="0" spc="1" kern="0">
                 <a:solidFill>
                   <a:srgbClr val="14161C"/>
                 </a:solidFill>
@@ -7685,10 +7685,10 @@
                 <a:ea typeface="Be Vietnam Pro SemiBold" pitchFamily="34" charset="-122"/>
                 <a:cs typeface="Be Vietnam Pro SemiBold" pitchFamily="34" charset="-120"/>
               </a:rPr>
-              <a:t> nhỏ, hoặc</a:t>
-            </a:r>
-            <a:r>
-              <a:rPr lang="en-US" sz="3450" dirty="0" spc="1" kern="0">
+              <a:t> đặt</a:t>
+            </a:r>
+            <a:r>
+              <a:rPr lang="en-US" sz="3450" dirty="0" spc="0" kern="0">
                 <a:solidFill>
                   <a:srgbClr val="14161C"/>
                 </a:solidFill>
@@ -7696,7 +7696,7 @@
                 <a:ea typeface="Be Vietnam Pro SemiBold" pitchFamily="34" charset="-122"/>
                 <a:cs typeface="Be Vietnam Pro SemiBold" pitchFamily="34" charset="-120"/>
               </a:rPr>
-              <a:t> đặt dữ</a:t>
+              <a:t> dữ</a:t>
             </a:r>
             <a:r>
               <a:rPr lang="en-US" sz="3450" dirty="0" spc="2" kern="0">

--- a/system-design-101/vi/lessons/sd-06-003/slides/sd-06-003.pptx
+++ b/system-design-101/vi/lessons/sd-06-003/slides/sd-06-003.pptx
@@ -5544,7 +5544,7 @@
                 <a:ea typeface="Bricolage Grotesque ExtraBold" pitchFamily="34" charset="-122"/>
                 <a:cs typeface="Bricolage Grotesque ExtraBold" pitchFamily="34" charset="-120"/>
               </a:rPr>
-              <a:t> là các</a:t>
+              <a:t> là</a:t>
             </a:r>
             <a:r>
               <a:rPr lang="en-US" sz="3600" dirty="0" spc="3" kern="0">
@@ -10770,73 +10770,7 @@
                 <a:ea typeface="Be Vietnam Pro" pitchFamily="34" charset="-122"/>
                 <a:cs typeface="Be Vietnam Pro" pitchFamily="34" charset="-120"/>
               </a:rPr>
-              <a:t> 7.0.15;</a:t>
-            </a:r>
-            <a:r>
-              <a:rPr lang="en-US" sz="2100" dirty="0" spc="-10" kern="0">
-                <a:solidFill>
-                  <a:srgbClr val="6B6A66"/>
-                </a:solidFill>
-                <a:latin typeface="Be Vietnam Pro" pitchFamily="34" charset="0"/>
-                <a:ea typeface="Be Vietnam Pro" pitchFamily="34" charset="-122"/>
-                <a:cs typeface="Be Vietnam Pro" pitchFamily="34" charset="-120"/>
-              </a:rPr>
-              <a:t> máy</a:t>
-            </a:r>
-            <a:r>
-              <a:rPr lang="en-US" sz="2100" dirty="0" spc="-1" kern="0">
-                <a:solidFill>
-                  <a:srgbClr val="6B6A66"/>
-                </a:solidFill>
-                <a:latin typeface="Be Vietnam Pro" pitchFamily="34" charset="0"/>
-                <a:ea typeface="Be Vietnam Pro" pitchFamily="34" charset="-122"/>
-                <a:cs typeface="Be Vietnam Pro" pitchFamily="34" charset="-120"/>
-              </a:rPr>
-              <a:t> khác</a:t>
-            </a:r>
-            <a:r>
-              <a:rPr lang="en-US" sz="2100" dirty="0" spc="-6" kern="0">
-                <a:solidFill>
-                  <a:srgbClr val="6B6A66"/>
-                </a:solidFill>
-                <a:latin typeface="Be Vietnam Pro" pitchFamily="34" charset="0"/>
-                <a:ea typeface="Be Vietnam Pro" pitchFamily="34" charset="-122"/>
-                <a:cs typeface="Be Vietnam Pro" pitchFamily="34" charset="-120"/>
-              </a:rPr>
-              <a:t> sẽ</a:t>
-            </a:r>
-            <a:r>
-              <a:rPr lang="en-US" sz="2100" dirty="0" spc="-31" kern="0">
-                <a:solidFill>
-                  <a:srgbClr val="6B6A66"/>
-                </a:solidFill>
-                <a:latin typeface="Be Vietnam Pro" pitchFamily="34" charset="0"/>
-                <a:ea typeface="Be Vietnam Pro" pitchFamily="34" charset="-122"/>
-                <a:cs typeface="Be Vietnam Pro" pitchFamily="34" charset="-120"/>
-              </a:rPr>
-              <a:t> ra</a:t>
-            </a:r>
-            <a:r>
-              <a:rPr lang="en-US" sz="2100" dirty="0" spc="-9" kern="0">
-                <a:solidFill>
-                  <a:srgbClr val="6B6A66"/>
-                </a:solidFill>
-                <a:latin typeface="Be Vietnam Pro" pitchFamily="34" charset="0"/>
-                <a:ea typeface="Be Vietnam Pro" pitchFamily="34" charset="-122"/>
-                <a:cs typeface="Be Vietnam Pro" pitchFamily="34" charset="-120"/>
-              </a:rPr>
-              <a:t> số</a:t>
-            </a:r>
-            <a:r>
-              <a:rPr lang="en-US" sz="2100" dirty="0" spc="-1" kern="0">
-                <a:solidFill>
-                  <a:srgbClr val="6B6A66"/>
-                </a:solidFill>
-                <a:latin typeface="Be Vietnam Pro" pitchFamily="34" charset="0"/>
-                <a:ea typeface="Be Vietnam Pro" pitchFamily="34" charset="-122"/>
-                <a:cs typeface="Be Vietnam Pro" pitchFamily="34" charset="-120"/>
-              </a:rPr>
-              <a:t> khác.</a:t>
+              <a:t> 7.0.15</a:t>
             </a:r>
             <a:endParaRPr lang="en-US" sz="2100" dirty="0"/>
           </a:p>

--- a/system-design-101/vi/lessons/sd-06-003/slides/sd-06-003.pptx
+++ b/system-design-101/vi/lessons/sd-06-003/slides/sd-06-003.pptx
@@ -1803,17 +1803,6 @@
                 <a:cs typeface="Bricolage Grotesque ExtraBold" pitchFamily="34" charset="-120"/>
               </a:rPr>
               <a:t> tới</a:t>
-            </a:r>
-            <a:r>
-              <a:rPr lang="en-US" sz="7500" dirty="0" spc="2" kern="0">
-                <a:solidFill>
-                  <a:srgbClr val="F3EEE3"/>
-                </a:solidFill>
-                <a:latin typeface="Bricolage Grotesque ExtraBold" pitchFamily="34" charset="0"/>
-                <a:ea typeface="Bricolage Grotesque ExtraBold" pitchFamily="34" charset="-122"/>
-                <a:cs typeface="Bricolage Grotesque ExtraBold" pitchFamily="34" charset="-120"/>
-              </a:rPr>
-              <a:t> việc</a:t>
             </a:r>
             <a:r>
               <a:rPr lang="en-US" sz="7500" dirty="0" spc="0" kern="0">
@@ -12259,7 +12248,7 @@
               <a:t> 7.0.15:</a:t>
             </a:r>
             <a:r>
-              <a:rPr lang="en-US" sz="2550" dirty="0" spc="-11" kern="0">
+              <a:rPr lang="en-US" sz="2550" dirty="0" spc="3" kern="0">
                 <a:solidFill>
                   <a:srgbClr val="E4E1D8"/>
                 </a:solidFill>
@@ -12267,7 +12256,18 @@
                 <a:ea typeface="Be Vietnam Pro" pitchFamily="34" charset="-122"/>
                 <a:cs typeface="Be Vietnam Pro" pitchFamily="34" charset="-120"/>
               </a:rPr>
-              <a:t> tệp</a:t>
+              <a:t> cấu</a:t>
+            </a:r>
+            <a:r>
+              <a:rPr lang="en-US" sz="2550" dirty="0" spc="0" kern="0">
+                <a:solidFill>
+                  <a:srgbClr val="E4E1D8"/>
+                </a:solidFill>
+                <a:latin typeface="Be Vietnam Pro" pitchFamily="34" charset="0"/>
+                <a:ea typeface="Be Vietnam Pro" pitchFamily="34" charset="-122"/>
+                <a:cs typeface="Be Vietnam Pro" pitchFamily="34" charset="-120"/>
+              </a:rPr>
+              <a:t> hình</a:t>
             </a:r>
             <a:r>
               <a:rPr lang="en-US" sz="2550" dirty="0" spc="2" kern="0">
@@ -12278,7 +12278,29 @@
                 <a:ea typeface="Be Vietnam Pro" pitchFamily="34" charset="-122"/>
                 <a:cs typeface="Be Vietnam Pro" pitchFamily="34" charset="-120"/>
               </a:rPr>
-              <a:t> cấu</a:t>
+              <a:t> mẫu</a:t>
+            </a:r>
+            <a:r>
+              <a:rPr lang="en-US" sz="2550" dirty="0" spc="-19" kern="0">
+                <a:solidFill>
+                  <a:srgbClr val="E4E1D8"/>
+                </a:solidFill>
+                <a:latin typeface="Be Vietnam Pro" pitchFamily="34" charset="0"/>
+                <a:ea typeface="Be Vietnam Pro" pitchFamily="34" charset="-122"/>
+                <a:cs typeface="Be Vietnam Pro" pitchFamily="34" charset="-120"/>
+              </a:rPr>
+              <a:t> và</a:t>
+            </a:r>
+            <a:r>
+              <a:rPr lang="en-US" sz="2550" dirty="0" spc="2" kern="0">
+                <a:solidFill>
+                  <a:srgbClr val="E4E1D8"/>
+                </a:solidFill>
+                <a:latin typeface="Be Vietnam Pro" pitchFamily="34" charset="0"/>
+                <a:ea typeface="Be Vietnam Pro" pitchFamily="34" charset="-122"/>
+                <a:cs typeface="Be Vietnam Pro" pitchFamily="34" charset="-120"/>
+              </a:rPr>
+              <a:t> mã</a:t>
             </a:r>
             <a:r>
               <a:rPr lang="en-US" sz="2550" dirty="0" spc="0" kern="0">
@@ -12289,51 +12311,7 @@
                 <a:ea typeface="Be Vietnam Pro" pitchFamily="34" charset="-122"/>
                 <a:cs typeface="Be Vietnam Pro" pitchFamily="34" charset="-120"/>
               </a:rPr>
-              <a:t> hình</a:t>
-            </a:r>
-            <a:r>
-              <a:rPr lang="en-US" sz="2550" dirty="0" spc="3" kern="0">
-                <a:solidFill>
-                  <a:srgbClr val="E4E1D8"/>
-                </a:solidFill>
-                <a:latin typeface="Be Vietnam Pro" pitchFamily="34" charset="0"/>
-                <a:ea typeface="Be Vietnam Pro" pitchFamily="34" charset="-122"/>
-                <a:cs typeface="Be Vietnam Pro" pitchFamily="34" charset="-120"/>
-              </a:rPr>
-              <a:t> mẫu</a:t>
-            </a:r>
-            <a:r>
-              <a:rPr lang="en-US" sz="2550" dirty="0" spc="-19" kern="0">
-                <a:solidFill>
-                  <a:srgbClr val="E4E1D8"/>
-                </a:solidFill>
-                <a:latin typeface="Be Vietnam Pro" pitchFamily="34" charset="0"/>
-                <a:ea typeface="Be Vietnam Pro" pitchFamily="34" charset="-122"/>
-                <a:cs typeface="Be Vietnam Pro" pitchFamily="34" charset="-120"/>
-              </a:rPr>
-              <a:t> và</a:t>
-            </a:r>
-            <a:r>
-              <a:rPr lang="en-US" sz="2550" dirty="0" spc="1" kern="0">
-                <a:solidFill>
-                  <a:srgbClr val="E4E1D8"/>
-                </a:solidFill>
-                <a:latin typeface="Be Vietnam Pro" pitchFamily="34" charset="0"/>
-                <a:ea typeface="Be Vietnam Pro" pitchFamily="34" charset="-122"/>
-                <a:cs typeface="Be Vietnam Pro" pitchFamily="34" charset="-120"/>
-              </a:rPr>
-              <a:t> mã nguồn</a:t>
-            </a:r>
-            <a:r>
-              <a:rPr lang="en-US" sz="2550" dirty="0" spc="-1" kern="0">
-                <a:solidFill>
-                  <a:srgbClr val="E4E1D8"/>
-                </a:solidFill>
-                <a:latin typeface="Be Vietnam Pro" pitchFamily="34" charset="0"/>
-                <a:ea typeface="Be Vietnam Pro" pitchFamily="34" charset="-122"/>
-                <a:cs typeface="Be Vietnam Pro" pitchFamily="34" charset="-120"/>
-              </a:rPr>
-              <a:t> ghi</a:t>
+              <a:t> nguồn ghi</a:t>
             </a:r>
             <a:r>
               <a:rPr lang="en-US" sz="2550" dirty="0" spc="-26" kern="0">

--- a/system-design-101/vi/lessons/sd-06-003/slides/sd-06-003.pptx
+++ b/system-design-101/vi/lessons/sd-06-003/slides/sd-06-003.pptx
@@ -1805,7 +1805,7 @@
               <a:t> tới</a:t>
             </a:r>
             <a:r>
-              <a:rPr lang="en-US" sz="7500" dirty="0" spc="0" kern="0">
+              <a:rPr lang="en-US" sz="7500" dirty="0" spc="-72" kern="0">
                 <a:solidFill>
                   <a:srgbClr val="F3EEE3"/>
                 </a:solidFill>
@@ -1813,21 +1813,10 @@
                 <a:ea typeface="Bricolage Grotesque ExtraBold" pitchFamily="34" charset="-122"/>
                 <a:cs typeface="Bricolage Grotesque ExtraBold" pitchFamily="34" charset="-120"/>
               </a:rPr>
-              <a:t> lưu</a:t>
-            </a:r>
-            <a:r>
-              <a:rPr lang="en-US" sz="7500" dirty="0" spc="-71" kern="0">
-                <a:solidFill>
-                  <a:srgbClr val="F3EEE3"/>
-                </a:solidFill>
-                <a:latin typeface="Bricolage Grotesque ExtraBold" pitchFamily="34" charset="0"/>
-                <a:ea typeface="Bricolage Grotesque ExtraBold" pitchFamily="34" charset="-122"/>
-                <a:cs typeface="Bricolage Grotesque ExtraBold" pitchFamily="34" charset="-120"/>
-              </a:rPr>
               <a:t> AOF</a:t>
             </a:r>
             <a:r>
-              <a:rPr lang="en-US" sz="7500" dirty="0" spc="0" kern="0">
+              <a:rPr lang="en-US" sz="7500" dirty="0" spc="1" kern="0">
                 <a:solidFill>
                   <a:srgbClr val="F3EEE3"/>
                 </a:solidFill>
